--- a/docs/yuz/10.23汇报/1023汇报.pptx
+++ b/docs/yuz/10.23汇报/1023汇报.pptx
@@ -10,6 +10,7 @@
     <p:sldId id="258" r:id="rId4"/>
     <p:sldId id="260" r:id="rId5"/>
     <p:sldId id="259" r:id="rId6"/>
+    <p:sldId id="261" r:id="rId7"/>
   </p:sldIdLst>
   <p:sldSz cx="12192000" cy="6858000"/>
   <p:notesSz cx="6858000" cy="9144000"/>
@@ -256,7 +257,7 @@
           <a:p>
             <a:fld id="{D997B5FA-0921-464F-AAE1-844C04324D75}" type="datetimeFigureOut">
               <a:rPr lang="zh-CN" altLang="en-US" smtClean="0"/>
-              <a:t>2025/10/23</a:t>
+              <a:t>2025/11/6</a:t>
             </a:fld>
             <a:endParaRPr lang="zh-CN" altLang="en-US"/>
           </a:p>
@@ -419,7 +420,7 @@
           <a:p>
             <a:fld id="{D997B5FA-0921-464F-AAE1-844C04324D75}" type="datetimeFigureOut">
               <a:rPr lang="zh-CN" altLang="en-US" smtClean="0"/>
-              <a:t>2025/10/23</a:t>
+              <a:t>2025/11/6</a:t>
             </a:fld>
             <a:endParaRPr lang="zh-CN" altLang="en-US"/>
           </a:p>
@@ -592,7 +593,7 @@
           <a:p>
             <a:fld id="{D997B5FA-0921-464F-AAE1-844C04324D75}" type="datetimeFigureOut">
               <a:rPr lang="zh-CN" altLang="en-US" smtClean="0"/>
-              <a:t>2025/10/23</a:t>
+              <a:t>2025/11/6</a:t>
             </a:fld>
             <a:endParaRPr lang="zh-CN" altLang="en-US"/>
           </a:p>
@@ -755,7 +756,7 @@
           <a:p>
             <a:fld id="{D997B5FA-0921-464F-AAE1-844C04324D75}" type="datetimeFigureOut">
               <a:rPr lang="zh-CN" altLang="en-US" smtClean="0"/>
-              <a:t>2025/10/23</a:t>
+              <a:t>2025/11/6</a:t>
             </a:fld>
             <a:endParaRPr lang="zh-CN" altLang="en-US"/>
           </a:p>
@@ -995,7 +996,7 @@
           <a:p>
             <a:fld id="{D997B5FA-0921-464F-AAE1-844C04324D75}" type="datetimeFigureOut">
               <a:rPr lang="zh-CN" altLang="en-US" smtClean="0"/>
-              <a:t>2025/10/23</a:t>
+              <a:t>2025/11/6</a:t>
             </a:fld>
             <a:endParaRPr lang="zh-CN" altLang="en-US"/>
           </a:p>
@@ -1219,7 +1220,7 @@
           <a:p>
             <a:fld id="{D997B5FA-0921-464F-AAE1-844C04324D75}" type="datetimeFigureOut">
               <a:rPr lang="zh-CN" altLang="en-US" smtClean="0"/>
-              <a:t>2025/10/23</a:t>
+              <a:t>2025/11/6</a:t>
             </a:fld>
             <a:endParaRPr lang="zh-CN" altLang="en-US"/>
           </a:p>
@@ -1578,7 +1579,7 @@
           <a:p>
             <a:fld id="{D997B5FA-0921-464F-AAE1-844C04324D75}" type="datetimeFigureOut">
               <a:rPr lang="zh-CN" altLang="en-US" smtClean="0"/>
-              <a:t>2025/10/23</a:t>
+              <a:t>2025/11/6</a:t>
             </a:fld>
             <a:endParaRPr lang="zh-CN" altLang="en-US"/>
           </a:p>
@@ -1690,7 +1691,7 @@
           <a:p>
             <a:fld id="{D997B5FA-0921-464F-AAE1-844C04324D75}" type="datetimeFigureOut">
               <a:rPr lang="zh-CN" altLang="en-US" smtClean="0"/>
-              <a:t>2025/10/23</a:t>
+              <a:t>2025/11/6</a:t>
             </a:fld>
             <a:endParaRPr lang="zh-CN" altLang="en-US"/>
           </a:p>
@@ -1780,7 +1781,7 @@
           <a:p>
             <a:fld id="{D997B5FA-0921-464F-AAE1-844C04324D75}" type="datetimeFigureOut">
               <a:rPr lang="zh-CN" altLang="en-US" smtClean="0"/>
-              <a:t>2025/10/23</a:t>
+              <a:t>2025/11/6</a:t>
             </a:fld>
             <a:endParaRPr lang="zh-CN" altLang="en-US"/>
           </a:p>
@@ -2050,7 +2051,7 @@
           <a:p>
             <a:fld id="{D997B5FA-0921-464F-AAE1-844C04324D75}" type="datetimeFigureOut">
               <a:rPr lang="zh-CN" altLang="en-US" smtClean="0"/>
-              <a:t>2025/10/23</a:t>
+              <a:t>2025/11/6</a:t>
             </a:fld>
             <a:endParaRPr lang="zh-CN" altLang="en-US"/>
           </a:p>
@@ -2297,7 +2298,7 @@
           <a:p>
             <a:fld id="{D997B5FA-0921-464F-AAE1-844C04324D75}" type="datetimeFigureOut">
               <a:rPr lang="zh-CN" altLang="en-US" smtClean="0"/>
-              <a:t>2025/10/23</a:t>
+              <a:t>2025/11/6</a:t>
             </a:fld>
             <a:endParaRPr lang="zh-CN" altLang="en-US"/>
           </a:p>
@@ -2503,7 +2504,7 @@
           <a:p>
             <a:fld id="{D997B5FA-0921-464F-AAE1-844C04324D75}" type="datetimeFigureOut">
               <a:rPr lang="zh-CN" altLang="en-US" smtClean="0"/>
-              <a:t>2025/10/23</a:t>
+              <a:t>2025/11/6</a:t>
             </a:fld>
             <a:endParaRPr lang="zh-CN" altLang="en-US"/>
           </a:p>
@@ -3194,7 +3195,7 @@
             </a:r>
             <a:r>
               <a:rPr lang="en-US" altLang="zh-CN" sz="2800" dirty="0"/>
-              <a:t>80%</a:t>
+              <a:t>100%</a:t>
             </a:r>
           </a:p>
           <a:p>
@@ -3392,19 +3393,18 @@
             <a:endParaRPr lang="en-US" altLang="zh-CN" sz="2800" dirty="0"/>
           </a:p>
           <a:p>
-            <a:pPr marL="457200" indent="-457200">
+            <a:pPr marL="914400" lvl="1" indent="-457200">
               <a:buFont typeface="Arial" panose="020B0604020202020204" pitchFamily="34" charset="0"/>
               <a:buChar char="•"/>
             </a:pPr>
             <a:r>
               <a:rPr lang="zh-CN" altLang="en-US" sz="2800" dirty="0"/>
-              <a:t>待完成内容：测试文档合并转换为</a:t>
+              <a:t>测试文档合并转换为</a:t>
             </a:r>
             <a:r>
               <a:rPr lang="en-US" altLang="zh-CN" sz="2800" dirty="0"/>
               <a:t>md</a:t>
             </a:r>
-            <a:endParaRPr lang="zh-CN" altLang="en-US" sz="2800" dirty="0"/>
           </a:p>
         </p:txBody>
       </p:sp>
@@ -3662,6 +3662,111 @@
     <p:extLst>
       <p:ext uri="{BB962C8B-B14F-4D97-AF65-F5344CB8AC3E}">
         <p14:creationId xmlns:p14="http://schemas.microsoft.com/office/powerpoint/2010/main" val="961574163"/>
+      </p:ext>
+    </p:extLst>
+  </p:cSld>
+  <p:clrMapOvr>
+    <a:masterClrMapping/>
+  </p:clrMapOvr>
+</p:sld>
+</file>
+
+<file path=ppt/slides/slide6.xml><?xml version="1.0" encoding="utf-8"?>
+<p:sld xmlns:a="http://schemas.openxmlformats.org/drawingml/2006/main" xmlns:r="http://schemas.openxmlformats.org/officeDocument/2006/relationships" xmlns:p="http://schemas.openxmlformats.org/presentationml/2006/main">
+  <p:cSld>
+    <p:spTree>
+      <p:nvGrpSpPr>
+        <p:cNvPr id="1" name="">
+          <a:extLst>
+            <a:ext uri="{FF2B5EF4-FFF2-40B4-BE49-F238E27FC236}">
+              <a16:creationId xmlns:a16="http://schemas.microsoft.com/office/drawing/2014/main" id="{E5DDB30D-5C78-8A79-B79A-A435D5670FE6}"/>
+            </a:ext>
+          </a:extLst>
+        </p:cNvPr>
+        <p:cNvGrpSpPr/>
+        <p:nvPr/>
+      </p:nvGrpSpPr>
+      <p:grpSpPr>
+        <a:xfrm>
+          <a:off x="0" y="0"/>
+          <a:ext cx="0" cy="0"/>
+          <a:chOff x="0" y="0"/>
+          <a:chExt cx="0" cy="0"/>
+        </a:xfrm>
+      </p:grpSpPr>
+      <p:sp>
+        <p:nvSpPr>
+          <p:cNvPr id="6" name="文本框 5">
+            <a:extLst>
+              <a:ext uri="{FF2B5EF4-FFF2-40B4-BE49-F238E27FC236}">
+                <a16:creationId xmlns:a16="http://schemas.microsoft.com/office/drawing/2014/main" id="{D982FAFF-872B-C234-A979-EA50F26ADBE4}"/>
+              </a:ext>
+            </a:extLst>
+          </p:cNvPr>
+          <p:cNvSpPr txBox="1"/>
+          <p:nvPr/>
+        </p:nvSpPr>
+        <p:spPr>
+          <a:xfrm>
+            <a:off x="342900" y="1463040"/>
+            <a:ext cx="1103187" cy="369332"/>
+          </a:xfrm>
+          <a:prstGeom prst="rect">
+            <a:avLst/>
+          </a:prstGeom>
+          <a:noFill/>
+        </p:spPr>
+        <p:txBody>
+          <a:bodyPr wrap="none" rtlCol="0">
+            <a:spAutoFit/>
+          </a:bodyPr>
+          <a:lstStyle/>
+          <a:p>
+            <a:r>
+              <a:rPr lang="en-US" altLang="zh-CN" dirty="0" err="1"/>
+              <a:t>Csdn</a:t>
+            </a:r>
+            <a:r>
+              <a:rPr lang="zh-CN" altLang="en-US" dirty="0"/>
+              <a:t>博客</a:t>
+            </a:r>
+          </a:p>
+        </p:txBody>
+      </p:sp>
+      <p:pic>
+        <p:nvPicPr>
+          <p:cNvPr id="3" name="图片 2">
+            <a:extLst>
+              <a:ext uri="{FF2B5EF4-FFF2-40B4-BE49-F238E27FC236}">
+                <a16:creationId xmlns:a16="http://schemas.microsoft.com/office/drawing/2014/main" id="{9678A9AF-A14F-6598-BAB4-58ACE61E1AA5}"/>
+              </a:ext>
+            </a:extLst>
+          </p:cNvPr>
+          <p:cNvPicPr>
+            <a:picLocks noChangeAspect="1"/>
+          </p:cNvPicPr>
+          <p:nvPr/>
+        </p:nvPicPr>
+        <p:blipFill>
+          <a:blip r:embed="rId2"/>
+          <a:stretch>
+            <a:fillRect/>
+          </a:stretch>
+        </p:blipFill>
+        <p:spPr>
+          <a:xfrm>
+            <a:off x="3118981" y="1054137"/>
+            <a:ext cx="8228646" cy="4749726"/>
+          </a:xfrm>
+          <a:prstGeom prst="rect">
+            <a:avLst/>
+          </a:prstGeom>
+        </p:spPr>
+      </p:pic>
+    </p:spTree>
+    <p:extLst>
+      <p:ext uri="{BB962C8B-B14F-4D97-AF65-F5344CB8AC3E}">
+        <p14:creationId xmlns:p14="http://schemas.microsoft.com/office/powerpoint/2010/main" val="49288838"/>
       </p:ext>
     </p:extLst>
   </p:cSld>

--- a/docs/yuz/10.23汇报/1023汇报.pptx
+++ b/docs/yuz/10.23汇报/1023汇报.pptx
@@ -11,6 +11,7 @@
     <p:sldId id="260" r:id="rId5"/>
     <p:sldId id="259" r:id="rId6"/>
     <p:sldId id="261" r:id="rId7"/>
+    <p:sldId id="265" r:id="rId8"/>
   </p:sldIdLst>
   <p:sldSz cx="12192000" cy="6858000"/>
   <p:notesSz cx="6858000" cy="9144000"/>
@@ -257,7 +258,7 @@
           <a:p>
             <a:fld id="{D997B5FA-0921-464F-AAE1-844C04324D75}" type="datetimeFigureOut">
               <a:rPr lang="zh-CN" altLang="en-US" smtClean="0"/>
-              <a:t>2025/11/6</a:t>
+              <a:t>2025/11/13</a:t>
             </a:fld>
             <a:endParaRPr lang="zh-CN" altLang="en-US"/>
           </a:p>
@@ -420,7 +421,7 @@
           <a:p>
             <a:fld id="{D997B5FA-0921-464F-AAE1-844C04324D75}" type="datetimeFigureOut">
               <a:rPr lang="zh-CN" altLang="en-US" smtClean="0"/>
-              <a:t>2025/11/6</a:t>
+              <a:t>2025/11/13</a:t>
             </a:fld>
             <a:endParaRPr lang="zh-CN" altLang="en-US"/>
           </a:p>
@@ -593,7 +594,7 @@
           <a:p>
             <a:fld id="{D997B5FA-0921-464F-AAE1-844C04324D75}" type="datetimeFigureOut">
               <a:rPr lang="zh-CN" altLang="en-US" smtClean="0"/>
-              <a:t>2025/11/6</a:t>
+              <a:t>2025/11/13</a:t>
             </a:fld>
             <a:endParaRPr lang="zh-CN" altLang="en-US"/>
           </a:p>
@@ -756,7 +757,7 @@
           <a:p>
             <a:fld id="{D997B5FA-0921-464F-AAE1-844C04324D75}" type="datetimeFigureOut">
               <a:rPr lang="zh-CN" altLang="en-US" smtClean="0"/>
-              <a:t>2025/11/6</a:t>
+              <a:t>2025/11/13</a:t>
             </a:fld>
             <a:endParaRPr lang="zh-CN" altLang="en-US"/>
           </a:p>
@@ -996,7 +997,7 @@
           <a:p>
             <a:fld id="{D997B5FA-0921-464F-AAE1-844C04324D75}" type="datetimeFigureOut">
               <a:rPr lang="zh-CN" altLang="en-US" smtClean="0"/>
-              <a:t>2025/11/6</a:t>
+              <a:t>2025/11/13</a:t>
             </a:fld>
             <a:endParaRPr lang="zh-CN" altLang="en-US"/>
           </a:p>
@@ -1220,7 +1221,7 @@
           <a:p>
             <a:fld id="{D997B5FA-0921-464F-AAE1-844C04324D75}" type="datetimeFigureOut">
               <a:rPr lang="zh-CN" altLang="en-US" smtClean="0"/>
-              <a:t>2025/11/6</a:t>
+              <a:t>2025/11/13</a:t>
             </a:fld>
             <a:endParaRPr lang="zh-CN" altLang="en-US"/>
           </a:p>
@@ -1579,7 +1580,7 @@
           <a:p>
             <a:fld id="{D997B5FA-0921-464F-AAE1-844C04324D75}" type="datetimeFigureOut">
               <a:rPr lang="zh-CN" altLang="en-US" smtClean="0"/>
-              <a:t>2025/11/6</a:t>
+              <a:t>2025/11/13</a:t>
             </a:fld>
             <a:endParaRPr lang="zh-CN" altLang="en-US"/>
           </a:p>
@@ -1691,7 +1692,7 @@
           <a:p>
             <a:fld id="{D997B5FA-0921-464F-AAE1-844C04324D75}" type="datetimeFigureOut">
               <a:rPr lang="zh-CN" altLang="en-US" smtClean="0"/>
-              <a:t>2025/11/6</a:t>
+              <a:t>2025/11/13</a:t>
             </a:fld>
             <a:endParaRPr lang="zh-CN" altLang="en-US"/>
           </a:p>
@@ -1781,7 +1782,7 @@
           <a:p>
             <a:fld id="{D997B5FA-0921-464F-AAE1-844C04324D75}" type="datetimeFigureOut">
               <a:rPr lang="zh-CN" altLang="en-US" smtClean="0"/>
-              <a:t>2025/11/6</a:t>
+              <a:t>2025/11/13</a:t>
             </a:fld>
             <a:endParaRPr lang="zh-CN" altLang="en-US"/>
           </a:p>
@@ -2051,7 +2052,7 @@
           <a:p>
             <a:fld id="{D997B5FA-0921-464F-AAE1-844C04324D75}" type="datetimeFigureOut">
               <a:rPr lang="zh-CN" altLang="en-US" smtClean="0"/>
-              <a:t>2025/11/6</a:t>
+              <a:t>2025/11/13</a:t>
             </a:fld>
             <a:endParaRPr lang="zh-CN" altLang="en-US"/>
           </a:p>
@@ -2298,7 +2299,7 @@
           <a:p>
             <a:fld id="{D997B5FA-0921-464F-AAE1-844C04324D75}" type="datetimeFigureOut">
               <a:rPr lang="zh-CN" altLang="en-US" smtClean="0"/>
-              <a:t>2025/11/6</a:t>
+              <a:t>2025/11/13</a:t>
             </a:fld>
             <a:endParaRPr lang="zh-CN" altLang="en-US"/>
           </a:p>
@@ -2504,7 +2505,7 @@
           <a:p>
             <a:fld id="{D997B5FA-0921-464F-AAE1-844C04324D75}" type="datetimeFigureOut">
               <a:rPr lang="zh-CN" altLang="en-US" smtClean="0"/>
-              <a:t>2025/11/6</a:t>
+              <a:t>2025/11/13</a:t>
             </a:fld>
             <a:endParaRPr lang="zh-CN" altLang="en-US"/>
           </a:p>
@@ -3776,6 +3777,555 @@
 </p:sld>
 </file>
 
+<file path=ppt/slides/slide7.xml><?xml version="1.0" encoding="utf-8"?>
+<p:sld xmlns:a="http://schemas.openxmlformats.org/drawingml/2006/main" xmlns:r="http://schemas.openxmlformats.org/officeDocument/2006/relationships" xmlns:p="http://schemas.openxmlformats.org/presentationml/2006/main">
+  <p:cSld>
+    <p:spTree>
+      <p:nvGrpSpPr>
+        <p:cNvPr id="1" name=""/>
+        <p:cNvGrpSpPr/>
+        <p:nvPr/>
+      </p:nvGrpSpPr>
+      <p:grpSpPr>
+        <a:xfrm>
+          <a:off x="0" y="0"/>
+          <a:ext cx="0" cy="0"/>
+          <a:chOff x="0" y="0"/>
+          <a:chExt cx="0" cy="0"/>
+        </a:xfrm>
+      </p:grpSpPr>
+      <p:sp>
+        <p:nvSpPr>
+          <p:cNvPr id="7" name="文本框 6">
+            <a:extLst>
+              <a:ext uri="{FF2B5EF4-FFF2-40B4-BE49-F238E27FC236}">
+                <a16:creationId xmlns:a16="http://schemas.microsoft.com/office/drawing/2014/main" id="{0A89BCC7-E809-3226-AA4A-E94E56B2643E}"/>
+              </a:ext>
+            </a:extLst>
+          </p:cNvPr>
+          <p:cNvSpPr txBox="1"/>
+          <p:nvPr/>
+        </p:nvSpPr>
+        <p:spPr>
+          <a:xfrm>
+            <a:off x="581186" y="1813302"/>
+            <a:ext cx="4324028" cy="2585323"/>
+          </a:xfrm>
+          <a:prstGeom prst="rect">
+            <a:avLst/>
+          </a:prstGeom>
+          <a:noFill/>
+        </p:spPr>
+        <p:txBody>
+          <a:bodyPr wrap="square" rtlCol="0">
+            <a:spAutoFit/>
+          </a:bodyPr>
+          <a:lstStyle/>
+          <a:p>
+            <a:r>
+              <a:rPr lang="zh-CN" altLang="en-US" dirty="0"/>
+              <a:t>对于上次的数字人项目，使用简易项目</a:t>
+            </a:r>
+            <a:r>
+              <a:rPr lang="en-US" altLang="zh-CN" dirty="0" err="1"/>
+              <a:t>musetalk</a:t>
+            </a:r>
+            <a:endParaRPr lang="en-US" altLang="zh-CN" dirty="0"/>
+          </a:p>
+          <a:p>
+            <a:endParaRPr lang="en-US" altLang="zh-CN" dirty="0"/>
+          </a:p>
+          <a:p>
+            <a:r>
+              <a:rPr lang="zh-CN" altLang="en-US" dirty="0"/>
+              <a:t>已完成：使用小组人员的真人视频测试  使用单一图片进行合成，经行渲染确保效果</a:t>
+            </a:r>
+            <a:endParaRPr lang="en-US" altLang="zh-CN" dirty="0"/>
+          </a:p>
+          <a:p>
+            <a:endParaRPr lang="en-US" altLang="zh-CN" dirty="0"/>
+          </a:p>
+          <a:p>
+            <a:r>
+              <a:rPr lang="zh-CN" altLang="en-US"/>
+              <a:t>待办：集成数字人，到我们的答题系统平台</a:t>
+            </a:r>
+            <a:endParaRPr lang="zh-CN" altLang="en-US" dirty="0"/>
+          </a:p>
+        </p:txBody>
+      </p:sp>
+      <p:pic>
+        <p:nvPicPr>
+          <p:cNvPr id="8" name="audio_0">
+            <a:hlinkClick r:id="" action="ppaction://media"/>
+            <a:extLst>
+              <a:ext uri="{FF2B5EF4-FFF2-40B4-BE49-F238E27FC236}">
+                <a16:creationId xmlns:a16="http://schemas.microsoft.com/office/drawing/2014/main" id="{A3830D2B-D100-01B4-E2DF-79C4C0F5CBE1}"/>
+              </a:ext>
+            </a:extLst>
+          </p:cNvPr>
+          <p:cNvPicPr>
+            <a:picLocks noChangeAspect="1"/>
+          </p:cNvPicPr>
+          <p:nvPr>
+            <a:videoFile r:link="rId2"/>
+            <p:extLst>
+              <p:ext uri="{DAA4B4D4-6D71-4841-9C94-3DE7FCFB9230}">
+                <p14:media xmlns:p14="http://schemas.microsoft.com/office/powerpoint/2010/main" r:embed="rId1"/>
+              </p:ext>
+            </p:extLst>
+          </p:nvPr>
+        </p:nvPicPr>
+        <p:blipFill>
+          <a:blip r:embed="rId8"/>
+          <a:stretch>
+            <a:fillRect/>
+          </a:stretch>
+        </p:blipFill>
+        <p:spPr>
+          <a:xfrm>
+            <a:off x="5074920" y="1059039"/>
+            <a:ext cx="1822778" cy="3148501"/>
+          </a:xfrm>
+          <a:prstGeom prst="rect">
+            <a:avLst/>
+          </a:prstGeom>
+        </p:spPr>
+      </p:pic>
+      <p:pic>
+        <p:nvPicPr>
+          <p:cNvPr id="2" name="output_audio (1)">
+            <a:hlinkClick r:id="" action="ppaction://media"/>
+            <a:extLst>
+              <a:ext uri="{FF2B5EF4-FFF2-40B4-BE49-F238E27FC236}">
+                <a16:creationId xmlns:a16="http://schemas.microsoft.com/office/drawing/2014/main" id="{5AA3256D-F126-D6F4-0D0C-C1D8C650AFC0}"/>
+              </a:ext>
+            </a:extLst>
+          </p:cNvPr>
+          <p:cNvPicPr>
+            <a:picLocks noChangeAspect="1"/>
+          </p:cNvPicPr>
+          <p:nvPr>
+            <a:videoFile r:link="rId4"/>
+            <p:extLst>
+              <p:ext uri="{DAA4B4D4-6D71-4841-9C94-3DE7FCFB9230}">
+                <p14:media xmlns:p14="http://schemas.microsoft.com/office/powerpoint/2010/main" r:embed="rId3"/>
+              </p:ext>
+            </p:extLst>
+          </p:nvPr>
+        </p:nvPicPr>
+        <p:blipFill>
+          <a:blip r:embed="rId9"/>
+          <a:stretch>
+            <a:fillRect/>
+          </a:stretch>
+        </p:blipFill>
+        <p:spPr>
+          <a:xfrm>
+            <a:off x="7262495" y="1007689"/>
+            <a:ext cx="3251200" cy="3251200"/>
+          </a:xfrm>
+          <a:prstGeom prst="rect">
+            <a:avLst/>
+          </a:prstGeom>
+        </p:spPr>
+      </p:pic>
+      <p:pic>
+        <p:nvPicPr>
+          <p:cNvPr id="3" name="Snipaste_2025-11-09_16-19-30_zzx10s">
+            <a:hlinkClick r:id="" action="ppaction://media"/>
+            <a:extLst>
+              <a:ext uri="{FF2B5EF4-FFF2-40B4-BE49-F238E27FC236}">
+                <a16:creationId xmlns:a16="http://schemas.microsoft.com/office/drawing/2014/main" id="{D071B84E-84F9-15CC-1AE9-723D309BA52D}"/>
+              </a:ext>
+            </a:extLst>
+          </p:cNvPr>
+          <p:cNvPicPr>
+            <a:picLocks noChangeAspect="1"/>
+          </p:cNvPicPr>
+          <p:nvPr>
+            <a:videoFile r:link="rId6"/>
+            <p:extLst>
+              <p:ext uri="{DAA4B4D4-6D71-4841-9C94-3DE7FCFB9230}">
+                <p14:media xmlns:p14="http://schemas.microsoft.com/office/powerpoint/2010/main" r:embed="rId5"/>
+              </p:ext>
+            </p:extLst>
+          </p:nvPr>
+        </p:nvPicPr>
+        <p:blipFill>
+          <a:blip r:embed="rId10"/>
+          <a:stretch>
+            <a:fillRect/>
+          </a:stretch>
+        </p:blipFill>
+        <p:spPr>
+          <a:xfrm>
+            <a:off x="4905214" y="4481195"/>
+            <a:ext cx="2146300" cy="2006600"/>
+          </a:xfrm>
+          <a:prstGeom prst="rect">
+            <a:avLst/>
+          </a:prstGeom>
+        </p:spPr>
+      </p:pic>
+    </p:spTree>
+    <p:extLst>
+      <p:ext uri="{BB962C8B-B14F-4D97-AF65-F5344CB8AC3E}">
+        <p14:creationId xmlns:p14="http://schemas.microsoft.com/office/powerpoint/2010/main" val="2786958514"/>
+      </p:ext>
+    </p:extLst>
+  </p:cSld>
+  <p:clrMapOvr>
+    <a:masterClrMapping/>
+  </p:clrMapOvr>
+  <p:timing>
+    <p:tnLst>
+      <p:par>
+        <p:cTn id="1" dur="indefinite" restart="never" nodeType="tmRoot">
+          <p:childTnLst>
+            <p:seq concurrent="1" nextAc="seek">
+              <p:cTn id="2" dur="indefinite" nodeType="mainSeq">
+                <p:childTnLst>
+                  <p:par>
+                    <p:cTn id="3" fill="hold">
+                      <p:stCondLst>
+                        <p:cond delay="indefinite"/>
+                      </p:stCondLst>
+                      <p:childTnLst>
+                        <p:par>
+                          <p:cTn id="4" fill="hold">
+                            <p:stCondLst>
+                              <p:cond delay="0"/>
+                            </p:stCondLst>
+                            <p:childTnLst>
+                              <p:par>
+                                <p:cTn id="5" presetID="1" presetClass="mediacall" presetSubtype="0" fill="hold" nodeType="clickEffect">
+                                  <p:stCondLst>
+                                    <p:cond delay="0"/>
+                                  </p:stCondLst>
+                                  <p:childTnLst>
+                                    <p:cmd type="call" cmd="playFrom(0.0)">
+                                      <p:cBhvr>
+                                        <p:cTn id="6" dur="8000" fill="hold"/>
+                                        <p:tgtEl>
+                                          <p:spTgt spid="8"/>
+                                        </p:tgtEl>
+                                      </p:cBhvr>
+                                    </p:cmd>
+                                  </p:childTnLst>
+                                </p:cTn>
+                              </p:par>
+                            </p:childTnLst>
+                          </p:cTn>
+                        </p:par>
+                      </p:childTnLst>
+                    </p:cTn>
+                  </p:par>
+                  <p:par>
+                    <p:cTn id="7" fill="hold">
+                      <p:stCondLst>
+                        <p:cond delay="indefinite"/>
+                      </p:stCondLst>
+                      <p:childTnLst>
+                        <p:par>
+                          <p:cTn id="8" fill="hold">
+                            <p:stCondLst>
+                              <p:cond delay="0"/>
+                            </p:stCondLst>
+                            <p:childTnLst>
+                              <p:par>
+                                <p:cTn id="9" presetID="1" presetClass="mediacall" presetSubtype="0" fill="hold" nodeType="clickEffect">
+                                  <p:stCondLst>
+                                    <p:cond delay="0"/>
+                                  </p:stCondLst>
+                                  <p:childTnLst>
+                                    <p:cmd type="call" cmd="playFrom(0.0)">
+                                      <p:cBhvr>
+                                        <p:cTn id="10" dur="2000" fill="hold"/>
+                                        <p:tgtEl>
+                                          <p:spTgt spid="2"/>
+                                        </p:tgtEl>
+                                      </p:cBhvr>
+                                    </p:cmd>
+                                  </p:childTnLst>
+                                </p:cTn>
+                              </p:par>
+                            </p:childTnLst>
+                          </p:cTn>
+                        </p:par>
+                      </p:childTnLst>
+                    </p:cTn>
+                  </p:par>
+                  <p:par>
+                    <p:cTn id="11" fill="hold">
+                      <p:stCondLst>
+                        <p:cond delay="indefinite"/>
+                      </p:stCondLst>
+                      <p:childTnLst>
+                        <p:par>
+                          <p:cTn id="12" fill="hold">
+                            <p:stCondLst>
+                              <p:cond delay="0"/>
+                            </p:stCondLst>
+                            <p:childTnLst>
+                              <p:par>
+                                <p:cTn id="13" presetID="1" presetClass="mediacall" presetSubtype="0" fill="hold" nodeType="clickEffect">
+                                  <p:stCondLst>
+                                    <p:cond delay="0"/>
+                                  </p:stCondLst>
+                                  <p:childTnLst>
+                                    <p:cmd type="call" cmd="playFrom(0.0)">
+                                      <p:cBhvr>
+                                        <p:cTn id="14" dur="9997" fill="hold"/>
+                                        <p:tgtEl>
+                                          <p:spTgt spid="3"/>
+                                        </p:tgtEl>
+                                      </p:cBhvr>
+                                    </p:cmd>
+                                  </p:childTnLst>
+                                </p:cTn>
+                              </p:par>
+                            </p:childTnLst>
+                          </p:cTn>
+                        </p:par>
+                      </p:childTnLst>
+                    </p:cTn>
+                  </p:par>
+                </p:childTnLst>
+              </p:cTn>
+              <p:prevCondLst>
+                <p:cond evt="onPrev" delay="0">
+                  <p:tgtEl>
+                    <p:sldTgt/>
+                  </p:tgtEl>
+                </p:cond>
+              </p:prevCondLst>
+              <p:nextCondLst>
+                <p:cond evt="onNext" delay="0">
+                  <p:tgtEl>
+                    <p:sldTgt/>
+                  </p:tgtEl>
+                </p:cond>
+              </p:nextCondLst>
+            </p:seq>
+            <p:video>
+              <p:cMediaNode vol="80000">
+                <p:cTn id="15" fill="hold" display="0">
+                  <p:stCondLst>
+                    <p:cond delay="indefinite"/>
+                  </p:stCondLst>
+                </p:cTn>
+                <p:tgtEl>
+                  <p:spTgt spid="8"/>
+                </p:tgtEl>
+              </p:cMediaNode>
+            </p:video>
+            <p:seq concurrent="1" nextAc="seek">
+              <p:cTn id="16" restart="whenNotActive" fill="hold" evtFilter="cancelBubble" nodeType="interactiveSeq">
+                <p:stCondLst>
+                  <p:cond evt="onClick" delay="0">
+                    <p:tgtEl>
+                      <p:spTgt spid="8"/>
+                    </p:tgtEl>
+                  </p:cond>
+                </p:stCondLst>
+                <p:endSync evt="end" delay="0">
+                  <p:rtn val="all"/>
+                </p:endSync>
+                <p:childTnLst>
+                  <p:par>
+                    <p:cTn id="17" fill="hold">
+                      <p:stCondLst>
+                        <p:cond delay="0"/>
+                      </p:stCondLst>
+                      <p:childTnLst>
+                        <p:par>
+                          <p:cTn id="18" fill="hold">
+                            <p:stCondLst>
+                              <p:cond delay="0"/>
+                            </p:stCondLst>
+                            <p:childTnLst>
+                              <p:par>
+                                <p:cTn id="19" presetID="2" presetClass="mediacall" presetSubtype="0" fill="hold" nodeType="clickEffect">
+                                  <p:stCondLst>
+                                    <p:cond delay="0"/>
+                                  </p:stCondLst>
+                                  <p:childTnLst>
+                                    <p:cmd type="call" cmd="togglePause">
+                                      <p:cBhvr>
+                                        <p:cTn id="20" dur="1" fill="hold"/>
+                                        <p:tgtEl>
+                                          <p:spTgt spid="8"/>
+                                        </p:tgtEl>
+                                      </p:cBhvr>
+                                    </p:cmd>
+                                  </p:childTnLst>
+                                </p:cTn>
+                              </p:par>
+                            </p:childTnLst>
+                          </p:cTn>
+                        </p:par>
+                      </p:childTnLst>
+                    </p:cTn>
+                  </p:par>
+                </p:childTnLst>
+              </p:cTn>
+              <p:nextCondLst>
+                <p:cond evt="onClick" delay="0">
+                  <p:tgtEl>
+                    <p:spTgt spid="8"/>
+                  </p:tgtEl>
+                </p:cond>
+              </p:nextCondLst>
+            </p:seq>
+            <p:video>
+              <p:cMediaNode vol="80000">
+                <p:cTn id="21" fill="hold" display="0">
+                  <p:stCondLst>
+                    <p:cond delay="indefinite"/>
+                  </p:stCondLst>
+                </p:cTn>
+                <p:tgtEl>
+                  <p:spTgt spid="2"/>
+                </p:tgtEl>
+              </p:cMediaNode>
+            </p:video>
+            <p:seq concurrent="1" nextAc="seek">
+              <p:cTn id="22" restart="whenNotActive" fill="hold" evtFilter="cancelBubble" nodeType="interactiveSeq">
+                <p:stCondLst>
+                  <p:cond evt="onClick" delay="0">
+                    <p:tgtEl>
+                      <p:spTgt spid="2"/>
+                    </p:tgtEl>
+                  </p:cond>
+                </p:stCondLst>
+                <p:endSync evt="end" delay="0">
+                  <p:rtn val="all"/>
+                </p:endSync>
+                <p:childTnLst>
+                  <p:par>
+                    <p:cTn id="23" fill="hold">
+                      <p:stCondLst>
+                        <p:cond delay="0"/>
+                      </p:stCondLst>
+                      <p:childTnLst>
+                        <p:par>
+                          <p:cTn id="24" fill="hold">
+                            <p:stCondLst>
+                              <p:cond delay="0"/>
+                            </p:stCondLst>
+                            <p:childTnLst>
+                              <p:par>
+                                <p:cTn id="25" presetID="2" presetClass="mediacall" presetSubtype="0" fill="hold" nodeType="clickEffect">
+                                  <p:stCondLst>
+                                    <p:cond delay="0"/>
+                                  </p:stCondLst>
+                                  <p:childTnLst>
+                                    <p:cmd type="call" cmd="togglePause">
+                                      <p:cBhvr>
+                                        <p:cTn id="26" dur="1" fill="hold"/>
+                                        <p:tgtEl>
+                                          <p:spTgt spid="2"/>
+                                        </p:tgtEl>
+                                      </p:cBhvr>
+                                    </p:cmd>
+                                  </p:childTnLst>
+                                </p:cTn>
+                              </p:par>
+                            </p:childTnLst>
+                          </p:cTn>
+                        </p:par>
+                      </p:childTnLst>
+                    </p:cTn>
+                  </p:par>
+                </p:childTnLst>
+              </p:cTn>
+              <p:nextCondLst>
+                <p:cond evt="onClick" delay="0">
+                  <p:tgtEl>
+                    <p:spTgt spid="2"/>
+                  </p:tgtEl>
+                </p:cond>
+              </p:nextCondLst>
+            </p:seq>
+            <p:video>
+              <p:cMediaNode vol="80000">
+                <p:cTn id="27" fill="hold" display="0">
+                  <p:stCondLst>
+                    <p:cond delay="indefinite"/>
+                  </p:stCondLst>
+                </p:cTn>
+                <p:tgtEl>
+                  <p:spTgt spid="3"/>
+                </p:tgtEl>
+              </p:cMediaNode>
+            </p:video>
+            <p:seq concurrent="1" nextAc="seek">
+              <p:cTn id="28" restart="whenNotActive" fill="hold" evtFilter="cancelBubble" nodeType="interactiveSeq">
+                <p:stCondLst>
+                  <p:cond evt="onClick" delay="0">
+                    <p:tgtEl>
+                      <p:spTgt spid="3"/>
+                    </p:tgtEl>
+                  </p:cond>
+                </p:stCondLst>
+                <p:endSync evt="end" delay="0">
+                  <p:rtn val="all"/>
+                </p:endSync>
+                <p:childTnLst>
+                  <p:par>
+                    <p:cTn id="29" fill="hold">
+                      <p:stCondLst>
+                        <p:cond delay="0"/>
+                      </p:stCondLst>
+                      <p:childTnLst>
+                        <p:par>
+                          <p:cTn id="30" fill="hold">
+                            <p:stCondLst>
+                              <p:cond delay="0"/>
+                            </p:stCondLst>
+                            <p:childTnLst>
+                              <p:par>
+                                <p:cTn id="31" presetID="2" presetClass="mediacall" presetSubtype="0" fill="hold" nodeType="clickEffect">
+                                  <p:stCondLst>
+                                    <p:cond delay="0"/>
+                                  </p:stCondLst>
+                                  <p:childTnLst>
+                                    <p:cmd type="call" cmd="togglePause">
+                                      <p:cBhvr>
+                                        <p:cTn id="32" dur="1" fill="hold"/>
+                                        <p:tgtEl>
+                                          <p:spTgt spid="3"/>
+                                        </p:tgtEl>
+                                      </p:cBhvr>
+                                    </p:cmd>
+                                  </p:childTnLst>
+                                </p:cTn>
+                              </p:par>
+                            </p:childTnLst>
+                          </p:cTn>
+                        </p:par>
+                      </p:childTnLst>
+                    </p:cTn>
+                  </p:par>
+                </p:childTnLst>
+              </p:cTn>
+              <p:nextCondLst>
+                <p:cond evt="onClick" delay="0">
+                  <p:tgtEl>
+                    <p:spTgt spid="3"/>
+                  </p:tgtEl>
+                </p:cond>
+              </p:nextCondLst>
+            </p:seq>
+          </p:childTnLst>
+        </p:cTn>
+      </p:par>
+    </p:tnLst>
+  </p:timing>
+</p:sld>
+</file>
+
 <file path=ppt/theme/theme1.xml><?xml version="1.0" encoding="utf-8"?>
 <a:theme xmlns:a="http://schemas.openxmlformats.org/drawingml/2006/main" name="WPS">
   <a:themeElements>
